--- a/examples/out_v2.pptx
+++ b/examples/out_v2.pptx
@@ -3355,8 +3355,8 @@
         </p:nvSpPr>
         <p:spPr>
           <a:xfrm>
-            <a:off x="468911" y="2939142"/>
-            <a:ext cx="2813468" cy="3429000"/>
+            <a:off x="468911" y="3429000"/>
+            <a:ext cx="2813468" cy="2939142"/>
           </a:xfrm>
           <a:prstGeom prst="rect">
             <a:avLst/>
@@ -3471,8 +3471,8 @@
         </p:nvSpPr>
         <p:spPr>
           <a:xfrm>
-            <a:off x="3282379" y="2939142"/>
-            <a:ext cx="2813468" cy="3429000"/>
+            <a:off x="3282379" y="3429000"/>
+            <a:ext cx="2813468" cy="2939142"/>
           </a:xfrm>
           <a:prstGeom prst="rect">
             <a:avLst/>
@@ -3587,8 +3587,8 @@
         </p:nvSpPr>
         <p:spPr>
           <a:xfrm>
-            <a:off x="6095847" y="2939142"/>
-            <a:ext cx="2813468" cy="3429000"/>
+            <a:off x="6095847" y="3429000"/>
+            <a:ext cx="2813468" cy="2939142"/>
           </a:xfrm>
           <a:prstGeom prst="rect">
             <a:avLst/>
@@ -3703,8 +3703,8 @@
         </p:nvSpPr>
         <p:spPr>
           <a:xfrm>
-            <a:off x="8909315" y="2939142"/>
-            <a:ext cx="2813468" cy="3429000"/>
+            <a:off x="8909315" y="3429000"/>
+            <a:ext cx="2813468" cy="2939142"/>
           </a:xfrm>
           <a:prstGeom prst="rect">
             <a:avLst/>
@@ -3872,8 +3872,8 @@
         </p:nvSpPr>
         <p:spPr>
           <a:xfrm>
-            <a:off x="468911" y="2449285"/>
-            <a:ext cx="3751290" cy="1469571"/>
+            <a:off x="468911" y="2939142"/>
+            <a:ext cx="3751290" cy="979714"/>
           </a:xfrm>
           <a:prstGeom prst="rect">
             <a:avLst/>
@@ -3988,8 +3988,8 @@
         </p:nvSpPr>
         <p:spPr>
           <a:xfrm>
-            <a:off x="4220202" y="2449285"/>
-            <a:ext cx="3751290" cy="1469571"/>
+            <a:off x="4220202" y="2939142"/>
+            <a:ext cx="3751290" cy="979714"/>
           </a:xfrm>
           <a:prstGeom prst="rect">
             <a:avLst/>
@@ -4104,8 +4104,8 @@
         </p:nvSpPr>
         <p:spPr>
           <a:xfrm>
-            <a:off x="7971493" y="2449285"/>
-            <a:ext cx="3751290" cy="1469571"/>
+            <a:off x="7971493" y="2939142"/>
+            <a:ext cx="3751290" cy="979714"/>
           </a:xfrm>
           <a:prstGeom prst="rect">
             <a:avLst/>
@@ -4220,8 +4220,8 @@
         </p:nvSpPr>
         <p:spPr>
           <a:xfrm>
-            <a:off x="468911" y="4898571"/>
-            <a:ext cx="3751290" cy="1469571"/>
+            <a:off x="468911" y="5388428"/>
+            <a:ext cx="3751290" cy="979714"/>
           </a:xfrm>
           <a:prstGeom prst="rect">
             <a:avLst/>
@@ -4336,8 +4336,8 @@
         </p:nvSpPr>
         <p:spPr>
           <a:xfrm>
-            <a:off x="4220202" y="4898571"/>
-            <a:ext cx="3751290" cy="1469571"/>
+            <a:off x="4220202" y="5388428"/>
+            <a:ext cx="3751290" cy="979714"/>
           </a:xfrm>
           <a:prstGeom prst="rect">
             <a:avLst/>
@@ -4452,8 +4452,8 @@
         </p:nvSpPr>
         <p:spPr>
           <a:xfrm>
-            <a:off x="7971493" y="4898571"/>
-            <a:ext cx="3751290" cy="1469571"/>
+            <a:off x="7971493" y="5388428"/>
+            <a:ext cx="3751290" cy="979714"/>
           </a:xfrm>
           <a:prstGeom prst="rect">
             <a:avLst/>
@@ -4541,7 +4541,7 @@
         <p:spPr>
           <a:xfrm>
             <a:off x="468911" y="1469571"/>
-            <a:ext cx="2813468" cy="2449285"/>
+            <a:ext cx="1875645" cy="1959428"/>
           </a:xfrm>
           <a:prstGeom prst="rect">
             <a:avLst/>
@@ -4595,16 +4595,16 @@
         </p:nvSpPr>
         <p:spPr>
           <a:xfrm>
-            <a:off x="3282379" y="1469571"/>
-            <a:ext cx="2813468" cy="489857"/>
-          </a:xfrm>
-          <a:prstGeom prst="rect">
-            <a:avLst/>
-          </a:prstGeom>
-          <a:noFill/>
-        </p:spPr>
-        <p:txBody>
-          <a:bodyPr wrap="square" anchor="t" lIns="0" rIns="0" tIns="0" bIns="0">
+            <a:off x="2344556" y="1469571"/>
+            <a:ext cx="2813468" cy="979714"/>
+          </a:xfrm>
+          <a:prstGeom prst="rect">
+            <a:avLst/>
+          </a:prstGeom>
+          <a:noFill/>
+        </p:spPr>
+        <p:txBody>
+          <a:bodyPr wrap="square" anchor="b" lIns="0" rIns="0" tIns="0" bIns="0">
             <a:spAutoFit/>
           </a:bodyPr>
           <a:lstStyle/>
@@ -4630,8 +4630,8 @@
         </p:nvSpPr>
         <p:spPr>
           <a:xfrm>
-            <a:off x="3282379" y="1959428"/>
-            <a:ext cx="2813468" cy="1959428"/>
+            <a:off x="2344556" y="2449285"/>
+            <a:ext cx="2813468" cy="979714"/>
           </a:xfrm>
           <a:prstGeom prst="rect">
             <a:avLst/>
@@ -4665,8 +4665,8 @@
         </p:nvSpPr>
         <p:spPr>
           <a:xfrm>
-            <a:off x="6095847" y="1469571"/>
-            <a:ext cx="2813468" cy="2449285"/>
+            <a:off x="7033670" y="1469571"/>
+            <a:ext cx="1875645" cy="1959428"/>
           </a:xfrm>
           <a:prstGeom prst="rect">
             <a:avLst/>
@@ -4721,15 +4721,15 @@
         <p:spPr>
           <a:xfrm>
             <a:off x="8909315" y="1469571"/>
-            <a:ext cx="2813468" cy="489857"/>
-          </a:xfrm>
-          <a:prstGeom prst="rect">
-            <a:avLst/>
-          </a:prstGeom>
-          <a:noFill/>
-        </p:spPr>
-        <p:txBody>
-          <a:bodyPr wrap="square" anchor="t" lIns="0" rIns="0" tIns="0" bIns="0">
+            <a:ext cx="2813468" cy="979714"/>
+          </a:xfrm>
+          <a:prstGeom prst="rect">
+            <a:avLst/>
+          </a:prstGeom>
+          <a:noFill/>
+        </p:spPr>
+        <p:txBody>
+          <a:bodyPr wrap="square" anchor="b" lIns="0" rIns="0" tIns="0" bIns="0">
             <a:spAutoFit/>
           </a:bodyPr>
           <a:lstStyle/>
@@ -4755,8 +4755,8 @@
         </p:nvSpPr>
         <p:spPr>
           <a:xfrm>
-            <a:off x="8909315" y="1959428"/>
-            <a:ext cx="2813468" cy="1959428"/>
+            <a:off x="8909315" y="2449285"/>
+            <a:ext cx="2813468" cy="979714"/>
           </a:xfrm>
           <a:prstGeom prst="rect">
             <a:avLst/>
@@ -4791,7 +4791,7 @@
         <p:spPr>
           <a:xfrm>
             <a:off x="468911" y="3918857"/>
-            <a:ext cx="2813468" cy="2449285"/>
+            <a:ext cx="1875645" cy="1959428"/>
           </a:xfrm>
           <a:prstGeom prst="rect">
             <a:avLst/>
@@ -4845,16 +4845,16 @@
         </p:nvSpPr>
         <p:spPr>
           <a:xfrm>
-            <a:off x="3282379" y="3918857"/>
-            <a:ext cx="2813468" cy="489857"/>
-          </a:xfrm>
-          <a:prstGeom prst="rect">
-            <a:avLst/>
-          </a:prstGeom>
-          <a:noFill/>
-        </p:spPr>
-        <p:txBody>
-          <a:bodyPr wrap="square" anchor="t" lIns="0" rIns="0" tIns="0" bIns="0">
+            <a:off x="2344556" y="3918857"/>
+            <a:ext cx="2813468" cy="979714"/>
+          </a:xfrm>
+          <a:prstGeom prst="rect">
+            <a:avLst/>
+          </a:prstGeom>
+          <a:noFill/>
+        </p:spPr>
+        <p:txBody>
+          <a:bodyPr wrap="square" anchor="b" lIns="0" rIns="0" tIns="0" bIns="0">
             <a:spAutoFit/>
           </a:bodyPr>
           <a:lstStyle/>
@@ -4880,8 +4880,8 @@
         </p:nvSpPr>
         <p:spPr>
           <a:xfrm>
-            <a:off x="3282379" y="4408714"/>
-            <a:ext cx="2813468" cy="1959428"/>
+            <a:off x="2344556" y="4898571"/>
+            <a:ext cx="2813468" cy="979714"/>
           </a:xfrm>
           <a:prstGeom prst="rect">
             <a:avLst/>
@@ -4915,8 +4915,8 @@
         </p:nvSpPr>
         <p:spPr>
           <a:xfrm>
-            <a:off x="6095847" y="3918857"/>
-            <a:ext cx="2813468" cy="2449285"/>
+            <a:off x="7033670" y="3918857"/>
+            <a:ext cx="1875645" cy="1959428"/>
           </a:xfrm>
           <a:prstGeom prst="rect">
             <a:avLst/>
@@ -4971,15 +4971,15 @@
         <p:spPr>
           <a:xfrm>
             <a:off x="8909315" y="3918857"/>
-            <a:ext cx="2813468" cy="489857"/>
-          </a:xfrm>
-          <a:prstGeom prst="rect">
-            <a:avLst/>
-          </a:prstGeom>
-          <a:noFill/>
-        </p:spPr>
-        <p:txBody>
-          <a:bodyPr wrap="square" anchor="t" lIns="0" rIns="0" tIns="0" bIns="0">
+            <a:ext cx="2813468" cy="979714"/>
+          </a:xfrm>
+          <a:prstGeom prst="rect">
+            <a:avLst/>
+          </a:prstGeom>
+          <a:noFill/>
+        </p:spPr>
+        <p:txBody>
+          <a:bodyPr wrap="square" anchor="b" lIns="0" rIns="0" tIns="0" bIns="0">
             <a:spAutoFit/>
           </a:bodyPr>
           <a:lstStyle/>
@@ -5005,8 +5005,8 @@
         </p:nvSpPr>
         <p:spPr>
           <a:xfrm>
-            <a:off x="8909315" y="4408714"/>
-            <a:ext cx="2813468" cy="1959428"/>
+            <a:off x="8909315" y="4898571"/>
+            <a:ext cx="2813468" cy="979714"/>
           </a:xfrm>
           <a:prstGeom prst="rect">
             <a:avLst/>
@@ -5284,16 +5284,16 @@
         </p:nvSpPr>
         <p:spPr>
           <a:xfrm>
-            <a:off x="7971493" y="1959428"/>
-            <a:ext cx="2813468" cy="2939142"/>
-          </a:xfrm>
-          <a:prstGeom prst="rect">
-            <a:avLst/>
-          </a:prstGeom>
-          <a:noFill/>
-        </p:spPr>
-        <p:txBody>
-          <a:bodyPr wrap="square" anchor="ctr" lIns="0" rIns="0" tIns="0" bIns="0">
+            <a:off x="7971493" y="1469571"/>
+            <a:ext cx="2813468" cy="3429000"/>
+          </a:xfrm>
+          <a:prstGeom prst="rect">
+            <a:avLst/>
+          </a:prstGeom>
+          <a:noFill/>
+        </p:spPr>
+        <p:txBody>
+          <a:bodyPr wrap="none" anchor="ctr" lIns="0" rIns="0" tIns="0" bIns="0">
             <a:spAutoFit/>
           </a:bodyPr>
           <a:lstStyle/>
@@ -5319,8 +5319,8 @@
         </p:nvSpPr>
         <p:spPr>
           <a:xfrm>
-            <a:off x="468911" y="4898571"/>
-            <a:ext cx="7502581" cy="1469571"/>
+            <a:off x="468911" y="5388428"/>
+            <a:ext cx="7502581" cy="979714"/>
           </a:xfrm>
           <a:prstGeom prst="rect">
             <a:avLst/>
@@ -5372,16 +5372,16 @@
         </p:nvSpPr>
         <p:spPr>
           <a:xfrm>
-            <a:off x="1406734" y="1959428"/>
-            <a:ext cx="2813468" cy="2939142"/>
-          </a:xfrm>
-          <a:prstGeom prst="rect">
-            <a:avLst/>
-          </a:prstGeom>
-          <a:noFill/>
-        </p:spPr>
-        <p:txBody>
-          <a:bodyPr wrap="square" anchor="ctr" lIns="0" rIns="0" tIns="0" bIns="0">
+            <a:off x="1406734" y="1469571"/>
+            <a:ext cx="2813468" cy="3429000"/>
+          </a:xfrm>
+          <a:prstGeom prst="rect">
+            <a:avLst/>
+          </a:prstGeom>
+          <a:noFill/>
+        </p:spPr>
+        <p:txBody>
+          <a:bodyPr wrap="none" anchor="ctr" lIns="0" rIns="0" tIns="0" bIns="0">
             <a:spAutoFit/>
           </a:bodyPr>
           <a:lstStyle/>
@@ -5407,8 +5407,8 @@
         </p:nvSpPr>
         <p:spPr>
           <a:xfrm>
-            <a:off x="4220202" y="4898571"/>
-            <a:ext cx="7502581" cy="1469571"/>
+            <a:off x="4220202" y="5388428"/>
+            <a:ext cx="7502581" cy="979714"/>
           </a:xfrm>
           <a:prstGeom prst="rect">
             <a:avLst/>
@@ -5504,15 +5504,15 @@
         <p:spPr>
           <a:xfrm>
             <a:off x="4220202" y="1469571"/>
-            <a:ext cx="3751290" cy="2939142"/>
-          </a:xfrm>
-          <a:prstGeom prst="rect">
-            <a:avLst/>
-          </a:prstGeom>
-          <a:noFill/>
-        </p:spPr>
-        <p:txBody>
-          <a:bodyPr wrap="square" anchor="ctr" lIns="0" rIns="0" tIns="0" bIns="0">
+            <a:ext cx="3751290" cy="3429000"/>
+          </a:xfrm>
+          <a:prstGeom prst="rect">
+            <a:avLst/>
+          </a:prstGeom>
+          <a:noFill/>
+        </p:spPr>
+        <p:txBody>
+          <a:bodyPr wrap="none" anchor="ctr" lIns="0" rIns="0" tIns="0" bIns="0">
             <a:spAutoFit/>
           </a:bodyPr>
           <a:lstStyle/>
@@ -5538,8 +5538,8 @@
         </p:nvSpPr>
         <p:spPr>
           <a:xfrm>
-            <a:off x="468911" y="4408714"/>
-            <a:ext cx="11253872" cy="1469571"/>
+            <a:off x="468911" y="5388428"/>
+            <a:ext cx="11253872" cy="979714"/>
           </a:xfrm>
           <a:prstGeom prst="rect">
             <a:avLst/>
@@ -5591,16 +5591,16 @@
         </p:nvSpPr>
         <p:spPr>
           <a:xfrm>
-            <a:off x="7971493" y="1959428"/>
-            <a:ext cx="2813468" cy="2939142"/>
-          </a:xfrm>
-          <a:prstGeom prst="rect">
-            <a:avLst/>
-          </a:prstGeom>
-          <a:noFill/>
-        </p:spPr>
-        <p:txBody>
-          <a:bodyPr wrap="square" anchor="ctr" lIns="0" rIns="0" tIns="0" bIns="0">
+            <a:off x="7971493" y="1469571"/>
+            <a:ext cx="2813468" cy="3429000"/>
+          </a:xfrm>
+          <a:prstGeom prst="rect">
+            <a:avLst/>
+          </a:prstGeom>
+          <a:noFill/>
+        </p:spPr>
+        <p:txBody>
+          <a:bodyPr wrap="none" anchor="ctr" lIns="0" rIns="0" tIns="0" bIns="0">
             <a:spAutoFit/>
           </a:bodyPr>
           <a:lstStyle/>
@@ -5626,8 +5626,8 @@
         </p:nvSpPr>
         <p:spPr>
           <a:xfrm>
-            <a:off x="468911" y="4898571"/>
-            <a:ext cx="7502581" cy="1469571"/>
+            <a:off x="468911" y="5388428"/>
+            <a:ext cx="7502581" cy="979714"/>
           </a:xfrm>
           <a:prstGeom prst="rect">
             <a:avLst/>
@@ -5714,16 +5714,16 @@
         </p:nvSpPr>
         <p:spPr>
           <a:xfrm>
-            <a:off x="468911" y="1959428"/>
-            <a:ext cx="7502581" cy="2939142"/>
-          </a:xfrm>
-          <a:prstGeom prst="rect">
-            <a:avLst/>
-          </a:prstGeom>
-          <a:noFill/>
-        </p:spPr>
-        <p:txBody>
-          <a:bodyPr wrap="square" anchor="t" lIns="0" rIns="0" tIns="0" bIns="0">
+            <a:off x="468911" y="1469571"/>
+            <a:ext cx="7502581" cy="3918857"/>
+          </a:xfrm>
+          <a:prstGeom prst="rect">
+            <a:avLst/>
+          </a:prstGeom>
+          <a:noFill/>
+        </p:spPr>
+        <p:txBody>
+          <a:bodyPr wrap="square" anchor="ctr" lIns="0" rIns="0" tIns="0" bIns="0">
             <a:spAutoFit/>
           </a:bodyPr>
           <a:lstStyle/>
@@ -5749,42 +5749,7 @@
         </p:nvSpPr>
         <p:spPr>
           <a:xfrm>
-            <a:off x="468911" y="4898571"/>
-            <a:ext cx="7502581" cy="979714"/>
-          </a:xfrm>
-          <a:prstGeom prst="rect">
-            <a:avLst/>
-          </a:prstGeom>
-          <a:noFill/>
-        </p:spPr>
-        <p:txBody>
-          <a:bodyPr wrap="square" anchor="t" lIns="0" rIns="0" tIns="0" bIns="0">
-            <a:spAutoFit/>
-          </a:bodyPr>
-          <a:lstStyle/>
-          <a:p>
-            <a:pPr algn="l"/>
-            <a:r>
-              <a:rPr sz="1100" b="0">
-                <a:solidFill>
-                  <a:srgbClr val="A1A8B3"/>
-                </a:solidFill>
-                <a:latin typeface="Arial"/>
-              </a:rPr>
-              <a:t>Total pipeline, end of Q4</a:t>
-            </a:r>
-          </a:p>
-        </p:txBody>
-      </p:sp>
-      <p:sp>
-        <p:nvSpPr>
-          <p:cNvPr id="5" name="TextBox 4"/>
-          <p:cNvSpPr txBox="1"/>
-          <p:nvPr/>
-        </p:nvSpPr>
-        <p:spPr>
-          <a:xfrm>
-            <a:off x="7971493" y="1959428"/>
+            <a:off x="7971493" y="1469571"/>
             <a:ext cx="3751290" cy="3918857"/>
           </a:xfrm>
           <a:prstGeom prst="rect">
@@ -5793,7 +5758,7 @@
           <a:noFill/>
         </p:spPr>
         <p:txBody>
-          <a:bodyPr wrap="square" anchor="t" lIns="0" rIns="0" tIns="0" bIns="0">
+          <a:bodyPr wrap="square" anchor="ctr" lIns="0" rIns="0" tIns="0" bIns="0">
             <a:spAutoFit/>
           </a:bodyPr>
           <a:lstStyle/>
@@ -5843,6 +5808,41 @@
                 <a:latin typeface="Arial"/>
               </a:rPr>
               <a:t>•  Largest deal: $1.8M ACV</a:t>
+            </a:r>
+          </a:p>
+        </p:txBody>
+      </p:sp>
+      <p:sp>
+        <p:nvSpPr>
+          <p:cNvPr id="5" name="TextBox 4"/>
+          <p:cNvSpPr txBox="1"/>
+          <p:nvPr/>
+        </p:nvSpPr>
+        <p:spPr>
+          <a:xfrm>
+            <a:off x="0" y="6368142"/>
+            <a:ext cx="12191695" cy="489857"/>
+          </a:xfrm>
+          <a:prstGeom prst="rect">
+            <a:avLst/>
+          </a:prstGeom>
+          <a:noFill/>
+        </p:spPr>
+        <p:txBody>
+          <a:bodyPr wrap="square" anchor="t" lIns="0" rIns="0" tIns="0" bIns="0">
+            <a:spAutoFit/>
+          </a:bodyPr>
+          <a:lstStyle/>
+          <a:p>
+            <a:pPr algn="l"/>
+            <a:r>
+              <a:rPr sz="1100" b="0">
+                <a:solidFill>
+                  <a:srgbClr val="A1A8B3"/>
+                </a:solidFill>
+                <a:latin typeface="Arial"/>
+              </a:rPr>
+              <a:t>Total pipeline, end of Q4</a:t>
             </a:r>
           </a:p>
         </p:txBody>

--- a/examples/out_v2.pptx
+++ b/examples/out_v2.pptx
@@ -3161,13 +3161,13 @@
         </p:spPr>
         <p:txBody>
           <a:bodyPr wrap="square" anchor="t" lIns="0" rIns="0" tIns="0" bIns="0">
-            <a:spAutoFit/>
+            <a:noAutofit/>
           </a:bodyPr>
           <a:lstStyle/>
           <a:p>
             <a:pPr algn="ctr"/>
             <a:r>
-              <a:rPr sz="3600" b="1">
+              <a:rPr sz="4800" b="1">
                 <a:solidFill>
                   <a:srgbClr val="000000"/>
                 </a:solidFill>
@@ -3196,7 +3196,7 @@
         </p:spPr>
         <p:txBody>
           <a:bodyPr wrap="square" anchor="t" lIns="0" rIns="0" tIns="0" bIns="0">
-            <a:spAutoFit/>
+            <a:noAutofit/>
           </a:bodyPr>
           <a:lstStyle/>
           <a:p>
@@ -3249,13 +3249,13 @@
         </p:spPr>
         <p:txBody>
           <a:bodyPr wrap="square" anchor="t" lIns="0" rIns="0" tIns="0" bIns="0">
-            <a:spAutoFit/>
+            <a:noAutofit/>
           </a:bodyPr>
           <a:lstStyle/>
           <a:p>
             <a:pPr algn="l"/>
             <a:r>
-              <a:rPr sz="3600" b="1">
+              <a:rPr sz="4800" b="1">
                 <a:solidFill>
                   <a:srgbClr val="000000"/>
                 </a:solidFill>
@@ -3365,13 +3365,13 @@
         </p:spPr>
         <p:txBody>
           <a:bodyPr wrap="square" anchor="t" lIns="0" rIns="0" tIns="0" bIns="0">
-            <a:spAutoFit/>
+            <a:noAutofit/>
           </a:bodyPr>
           <a:lstStyle/>
           <a:p>
             <a:pPr algn="l"/>
             <a:r>
-              <a:rPr sz="1400" b="0">
+              <a:rPr sz="1500" b="0">
                 <a:solidFill>
                   <a:srgbClr val="000000"/>
                 </a:solidFill>
@@ -3481,13 +3481,13 @@
         </p:spPr>
         <p:txBody>
           <a:bodyPr wrap="square" anchor="t" lIns="0" rIns="0" tIns="0" bIns="0">
-            <a:spAutoFit/>
+            <a:noAutofit/>
           </a:bodyPr>
           <a:lstStyle/>
           <a:p>
             <a:pPr algn="l"/>
             <a:r>
-              <a:rPr sz="1400" b="0">
+              <a:rPr sz="1500" b="0">
                 <a:solidFill>
                   <a:srgbClr val="000000"/>
                 </a:solidFill>
@@ -3597,13 +3597,13 @@
         </p:spPr>
         <p:txBody>
           <a:bodyPr wrap="square" anchor="t" lIns="0" rIns="0" tIns="0" bIns="0">
-            <a:spAutoFit/>
+            <a:noAutofit/>
           </a:bodyPr>
           <a:lstStyle/>
           <a:p>
             <a:pPr algn="l"/>
             <a:r>
-              <a:rPr sz="1400" b="0">
+              <a:rPr sz="1500" b="0">
                 <a:solidFill>
                   <a:srgbClr val="000000"/>
                 </a:solidFill>
@@ -3713,13 +3713,13 @@
         </p:spPr>
         <p:txBody>
           <a:bodyPr wrap="square" anchor="t" lIns="0" rIns="0" tIns="0" bIns="0">
-            <a:spAutoFit/>
+            <a:noAutofit/>
           </a:bodyPr>
           <a:lstStyle/>
           <a:p>
             <a:pPr algn="l"/>
             <a:r>
-              <a:rPr sz="1400" b="0">
+              <a:rPr sz="1500" b="0">
                 <a:solidFill>
                   <a:srgbClr val="000000"/>
                 </a:solidFill>
@@ -3766,13 +3766,13 @@
         </p:spPr>
         <p:txBody>
           <a:bodyPr wrap="square" anchor="t" lIns="0" rIns="0" tIns="0" bIns="0">
-            <a:spAutoFit/>
+            <a:noAutofit/>
           </a:bodyPr>
           <a:lstStyle/>
           <a:p>
             <a:pPr algn="l"/>
             <a:r>
-              <a:rPr sz="3600" b="1">
+              <a:rPr sz="4800" b="1">
                 <a:solidFill>
                   <a:srgbClr val="000000"/>
                 </a:solidFill>
@@ -3872,8 +3872,8 @@
         </p:nvSpPr>
         <p:spPr>
           <a:xfrm>
-            <a:off x="468911" y="2939142"/>
-            <a:ext cx="3751290" cy="979714"/>
+            <a:off x="468911" y="2449285"/>
+            <a:ext cx="3751290" cy="1469571"/>
           </a:xfrm>
           <a:prstGeom prst="rect">
             <a:avLst/>
@@ -3882,13 +3882,13 @@
         </p:spPr>
         <p:txBody>
           <a:bodyPr wrap="square" anchor="t" lIns="0" rIns="0" tIns="0" bIns="0">
-            <a:spAutoFit/>
+            <a:noAutofit/>
           </a:bodyPr>
           <a:lstStyle/>
           <a:p>
             <a:pPr algn="l"/>
             <a:r>
-              <a:rPr sz="1400" b="0">
+              <a:rPr sz="1500" b="0">
                 <a:solidFill>
                   <a:srgbClr val="000000"/>
                 </a:solidFill>
@@ -3988,8 +3988,8 @@
         </p:nvSpPr>
         <p:spPr>
           <a:xfrm>
-            <a:off x="4220202" y="2939142"/>
-            <a:ext cx="3751290" cy="979714"/>
+            <a:off x="4220202" y="2449285"/>
+            <a:ext cx="3751290" cy="1469571"/>
           </a:xfrm>
           <a:prstGeom prst="rect">
             <a:avLst/>
@@ -3998,13 +3998,13 @@
         </p:spPr>
         <p:txBody>
           <a:bodyPr wrap="square" anchor="t" lIns="0" rIns="0" tIns="0" bIns="0">
-            <a:spAutoFit/>
+            <a:noAutofit/>
           </a:bodyPr>
           <a:lstStyle/>
           <a:p>
             <a:pPr algn="l"/>
             <a:r>
-              <a:rPr sz="1400" b="0">
+              <a:rPr sz="1500" b="0">
                 <a:solidFill>
                   <a:srgbClr val="000000"/>
                 </a:solidFill>
@@ -4104,8 +4104,8 @@
         </p:nvSpPr>
         <p:spPr>
           <a:xfrm>
-            <a:off x="7971493" y="2939142"/>
-            <a:ext cx="3751290" cy="979714"/>
+            <a:off x="7971493" y="2449285"/>
+            <a:ext cx="3751290" cy="1469571"/>
           </a:xfrm>
           <a:prstGeom prst="rect">
             <a:avLst/>
@@ -4114,13 +4114,13 @@
         </p:spPr>
         <p:txBody>
           <a:bodyPr wrap="square" anchor="t" lIns="0" rIns="0" tIns="0" bIns="0">
-            <a:spAutoFit/>
+            <a:noAutofit/>
           </a:bodyPr>
           <a:lstStyle/>
           <a:p>
             <a:pPr algn="l"/>
             <a:r>
-              <a:rPr sz="1400" b="0">
+              <a:rPr sz="1500" b="0">
                 <a:solidFill>
                   <a:srgbClr val="000000"/>
                 </a:solidFill>
@@ -4220,8 +4220,8 @@
         </p:nvSpPr>
         <p:spPr>
           <a:xfrm>
-            <a:off x="468911" y="5388428"/>
-            <a:ext cx="3751290" cy="979714"/>
+            <a:off x="468911" y="4898571"/>
+            <a:ext cx="3751290" cy="1469571"/>
           </a:xfrm>
           <a:prstGeom prst="rect">
             <a:avLst/>
@@ -4230,13 +4230,13 @@
         </p:spPr>
         <p:txBody>
           <a:bodyPr wrap="square" anchor="t" lIns="0" rIns="0" tIns="0" bIns="0">
-            <a:spAutoFit/>
+            <a:noAutofit/>
           </a:bodyPr>
           <a:lstStyle/>
           <a:p>
             <a:pPr algn="l"/>
             <a:r>
-              <a:rPr sz="1400" b="0">
+              <a:rPr sz="1500" b="0">
                 <a:solidFill>
                   <a:srgbClr val="000000"/>
                 </a:solidFill>
@@ -4336,8 +4336,8 @@
         </p:nvSpPr>
         <p:spPr>
           <a:xfrm>
-            <a:off x="4220202" y="5388428"/>
-            <a:ext cx="3751290" cy="979714"/>
+            <a:off x="4220202" y="4898571"/>
+            <a:ext cx="3751290" cy="1469571"/>
           </a:xfrm>
           <a:prstGeom prst="rect">
             <a:avLst/>
@@ -4346,13 +4346,13 @@
         </p:spPr>
         <p:txBody>
           <a:bodyPr wrap="square" anchor="t" lIns="0" rIns="0" tIns="0" bIns="0">
-            <a:spAutoFit/>
+            <a:noAutofit/>
           </a:bodyPr>
           <a:lstStyle/>
           <a:p>
             <a:pPr algn="l"/>
             <a:r>
-              <a:rPr sz="1400" b="0">
+              <a:rPr sz="1500" b="0">
                 <a:solidFill>
                   <a:srgbClr val="000000"/>
                 </a:solidFill>
@@ -4452,8 +4452,8 @@
         </p:nvSpPr>
         <p:spPr>
           <a:xfrm>
-            <a:off x="7971493" y="5388428"/>
-            <a:ext cx="3751290" cy="979714"/>
+            <a:off x="7971493" y="4898571"/>
+            <a:ext cx="3751290" cy="1469571"/>
           </a:xfrm>
           <a:prstGeom prst="rect">
             <a:avLst/>
@@ -4462,13 +4462,13 @@
         </p:spPr>
         <p:txBody>
           <a:bodyPr wrap="square" anchor="t" lIns="0" rIns="0" tIns="0" bIns="0">
-            <a:spAutoFit/>
+            <a:noAutofit/>
           </a:bodyPr>
           <a:lstStyle/>
           <a:p>
             <a:pPr algn="l"/>
             <a:r>
-              <a:rPr sz="1400" b="0">
+              <a:rPr sz="1500" b="0">
                 <a:solidFill>
                   <a:srgbClr val="000000"/>
                 </a:solidFill>
@@ -4515,13 +4515,13 @@
         </p:spPr>
         <p:txBody>
           <a:bodyPr wrap="square" anchor="t" lIns="0" rIns="0" tIns="0" bIns="0">
-            <a:spAutoFit/>
+            <a:noAutofit/>
           </a:bodyPr>
           <a:lstStyle/>
           <a:p>
             <a:pPr algn="l"/>
             <a:r>
-              <a:rPr sz="3600" b="1">
+              <a:rPr sz="4800" b="1">
                 <a:solidFill>
                   <a:srgbClr val="000000"/>
                 </a:solidFill>
@@ -4541,7 +4541,7 @@
         <p:spPr>
           <a:xfrm>
             <a:off x="468911" y="1469571"/>
-            <a:ext cx="1875645" cy="1959428"/>
+            <a:ext cx="1800619" cy="1959428"/>
           </a:xfrm>
           <a:prstGeom prst="rect">
             <a:avLst/>
@@ -4595,8 +4595,8 @@
         </p:nvSpPr>
         <p:spPr>
           <a:xfrm>
-            <a:off x="2344556" y="1469571"/>
-            <a:ext cx="2813468" cy="979714"/>
+            <a:off x="2607147" y="1616528"/>
+            <a:ext cx="3488700" cy="685799"/>
           </a:xfrm>
           <a:prstGeom prst="rect">
             <a:avLst/>
@@ -4605,7 +4605,7 @@
         </p:spPr>
         <p:txBody>
           <a:bodyPr wrap="square" anchor="b" lIns="0" rIns="0" tIns="0" bIns="0">
-            <a:spAutoFit/>
+            <a:noAutofit/>
           </a:bodyPr>
           <a:lstStyle/>
           <a:p>
@@ -4630,8 +4630,8 @@
         </p:nvSpPr>
         <p:spPr>
           <a:xfrm>
-            <a:off x="2344556" y="2449285"/>
-            <a:ext cx="2813468" cy="979714"/>
+            <a:off x="2607147" y="2302328"/>
+            <a:ext cx="3488700" cy="979714"/>
           </a:xfrm>
           <a:prstGeom prst="rect">
             <a:avLst/>
@@ -4640,13 +4640,13 @@
         </p:spPr>
         <p:txBody>
           <a:bodyPr wrap="square" anchor="t" lIns="0" rIns="0" tIns="0" bIns="0">
-            <a:spAutoFit/>
+            <a:noAutofit/>
           </a:bodyPr>
           <a:lstStyle/>
           <a:p>
             <a:pPr algn="l"/>
             <a:r>
-              <a:rPr sz="1400" b="0">
+              <a:rPr sz="1500" b="0">
                 <a:solidFill>
                   <a:srgbClr val="000000"/>
                 </a:solidFill>
@@ -4665,8 +4665,8 @@
         </p:nvSpPr>
         <p:spPr>
           <a:xfrm>
-            <a:off x="7033670" y="1469571"/>
-            <a:ext cx="1875645" cy="1959428"/>
+            <a:off x="6095847" y="1469571"/>
+            <a:ext cx="1800619" cy="1959428"/>
           </a:xfrm>
           <a:prstGeom prst="rect">
             <a:avLst/>
@@ -4720,8 +4720,8 @@
         </p:nvSpPr>
         <p:spPr>
           <a:xfrm>
-            <a:off x="8909315" y="1469571"/>
-            <a:ext cx="2813468" cy="979714"/>
+            <a:off x="8234083" y="1616528"/>
+            <a:ext cx="3488700" cy="685799"/>
           </a:xfrm>
           <a:prstGeom prst="rect">
             <a:avLst/>
@@ -4730,7 +4730,7 @@
         </p:spPr>
         <p:txBody>
           <a:bodyPr wrap="square" anchor="b" lIns="0" rIns="0" tIns="0" bIns="0">
-            <a:spAutoFit/>
+            <a:noAutofit/>
           </a:bodyPr>
           <a:lstStyle/>
           <a:p>
@@ -4755,8 +4755,8 @@
         </p:nvSpPr>
         <p:spPr>
           <a:xfrm>
-            <a:off x="8909315" y="2449285"/>
-            <a:ext cx="2813468" cy="979714"/>
+            <a:off x="8234083" y="2302328"/>
+            <a:ext cx="3488700" cy="979714"/>
           </a:xfrm>
           <a:prstGeom prst="rect">
             <a:avLst/>
@@ -4765,13 +4765,13 @@
         </p:spPr>
         <p:txBody>
           <a:bodyPr wrap="square" anchor="t" lIns="0" rIns="0" tIns="0" bIns="0">
-            <a:spAutoFit/>
+            <a:noAutofit/>
           </a:bodyPr>
           <a:lstStyle/>
           <a:p>
             <a:pPr algn="l"/>
             <a:r>
-              <a:rPr sz="1400" b="0">
+              <a:rPr sz="1500" b="0">
                 <a:solidFill>
                   <a:srgbClr val="000000"/>
                 </a:solidFill>
@@ -4791,7 +4791,7 @@
         <p:spPr>
           <a:xfrm>
             <a:off x="468911" y="3918857"/>
-            <a:ext cx="1875645" cy="1959428"/>
+            <a:ext cx="1800619" cy="1959428"/>
           </a:xfrm>
           <a:prstGeom prst="rect">
             <a:avLst/>
@@ -4845,8 +4845,8 @@
         </p:nvSpPr>
         <p:spPr>
           <a:xfrm>
-            <a:off x="2344556" y="3918857"/>
-            <a:ext cx="2813468" cy="979714"/>
+            <a:off x="2607147" y="4065814"/>
+            <a:ext cx="3488700" cy="685799"/>
           </a:xfrm>
           <a:prstGeom prst="rect">
             <a:avLst/>
@@ -4855,7 +4855,7 @@
         </p:spPr>
         <p:txBody>
           <a:bodyPr wrap="square" anchor="b" lIns="0" rIns="0" tIns="0" bIns="0">
-            <a:spAutoFit/>
+            <a:noAutofit/>
           </a:bodyPr>
           <a:lstStyle/>
           <a:p>
@@ -4880,8 +4880,8 @@
         </p:nvSpPr>
         <p:spPr>
           <a:xfrm>
-            <a:off x="2344556" y="4898571"/>
-            <a:ext cx="2813468" cy="979714"/>
+            <a:off x="2607147" y="4751614"/>
+            <a:ext cx="3488700" cy="979714"/>
           </a:xfrm>
           <a:prstGeom prst="rect">
             <a:avLst/>
@@ -4890,13 +4890,13 @@
         </p:spPr>
         <p:txBody>
           <a:bodyPr wrap="square" anchor="t" lIns="0" rIns="0" tIns="0" bIns="0">
-            <a:spAutoFit/>
+            <a:noAutofit/>
           </a:bodyPr>
           <a:lstStyle/>
           <a:p>
             <a:pPr algn="l"/>
             <a:r>
-              <a:rPr sz="1400" b="0">
+              <a:rPr sz="1500" b="0">
                 <a:solidFill>
                   <a:srgbClr val="000000"/>
                 </a:solidFill>
@@ -4915,8 +4915,8 @@
         </p:nvSpPr>
         <p:spPr>
           <a:xfrm>
-            <a:off x="7033670" y="3918857"/>
-            <a:ext cx="1875645" cy="1959428"/>
+            <a:off x="6095847" y="3918857"/>
+            <a:ext cx="1800619" cy="1959428"/>
           </a:xfrm>
           <a:prstGeom prst="rect">
             <a:avLst/>
@@ -4970,8 +4970,8 @@
         </p:nvSpPr>
         <p:spPr>
           <a:xfrm>
-            <a:off x="8909315" y="3918857"/>
-            <a:ext cx="2813468" cy="979714"/>
+            <a:off x="8234083" y="4065814"/>
+            <a:ext cx="3488700" cy="685799"/>
           </a:xfrm>
           <a:prstGeom prst="rect">
             <a:avLst/>
@@ -4980,7 +4980,7 @@
         </p:spPr>
         <p:txBody>
           <a:bodyPr wrap="square" anchor="b" lIns="0" rIns="0" tIns="0" bIns="0">
-            <a:spAutoFit/>
+            <a:noAutofit/>
           </a:bodyPr>
           <a:lstStyle/>
           <a:p>
@@ -5005,8 +5005,8 @@
         </p:nvSpPr>
         <p:spPr>
           <a:xfrm>
-            <a:off x="8909315" y="4898571"/>
-            <a:ext cx="2813468" cy="979714"/>
+            <a:off x="8234083" y="4751614"/>
+            <a:ext cx="3488700" cy="979714"/>
           </a:xfrm>
           <a:prstGeom prst="rect">
             <a:avLst/>
@@ -5015,13 +5015,13 @@
         </p:spPr>
         <p:txBody>
           <a:bodyPr wrap="square" anchor="t" lIns="0" rIns="0" tIns="0" bIns="0">
-            <a:spAutoFit/>
+            <a:noAutofit/>
           </a:bodyPr>
           <a:lstStyle/>
           <a:p>
             <a:pPr algn="l"/>
             <a:r>
-              <a:rPr sz="1400" b="0">
+              <a:rPr sz="1500" b="0">
                 <a:solidFill>
                   <a:srgbClr val="000000"/>
                 </a:solidFill>
@@ -5111,13 +5111,13 @@
         </p:spPr>
         <p:txBody>
           <a:bodyPr wrap="square" anchor="t" lIns="0" rIns="0" tIns="0" bIns="0">
-            <a:spAutoFit/>
+            <a:noAutofit/>
           </a:bodyPr>
           <a:lstStyle/>
           <a:p>
             <a:pPr algn="ctr"/>
             <a:r>
-              <a:rPr sz="3600" b="1">
+              <a:rPr sz="4800" b="1">
                 <a:solidFill>
                   <a:srgbClr val="000000"/>
                 </a:solidFill>
@@ -5130,7 +5130,7 @@
       </p:sp>
       <p:sp>
         <p:nvSpPr>
-          <p:cNvPr id="4" name="Rounded Rectangle 3"/>
+          <p:cNvPr id="4" name="Rectangle 3"/>
           <p:cNvSpPr/>
           <p:nvPr/>
         </p:nvSpPr>
@@ -5139,7 +5139,7 @@
             <a:off x="4220202" y="3429000"/>
             <a:ext cx="3751290" cy="979714"/>
           </a:xfrm>
-          <a:prstGeom prst="roundRect">
+          <a:prstGeom prst="rect">
             <a:avLst/>
           </a:prstGeom>
           <a:solidFill>
@@ -5198,7 +5198,7 @@
         </p:spPr>
         <p:txBody>
           <a:bodyPr wrap="square" anchor="t" lIns="0" rIns="0" tIns="0" bIns="0">
-            <a:spAutoFit/>
+            <a:noAutofit/>
           </a:bodyPr>
           <a:lstStyle/>
           <a:p>
@@ -5284,8 +5284,8 @@
         </p:nvSpPr>
         <p:spPr>
           <a:xfrm>
-            <a:off x="7971493" y="1469571"/>
-            <a:ext cx="2813468" cy="3429000"/>
+            <a:off x="7971493" y="979714"/>
+            <a:ext cx="2813468" cy="4408714"/>
           </a:xfrm>
           <a:prstGeom prst="rect">
             <a:avLst/>
@@ -5294,19 +5294,19 @@
         </p:spPr>
         <p:txBody>
           <a:bodyPr wrap="none" anchor="ctr" lIns="0" rIns="0" tIns="0" bIns="0">
-            <a:spAutoFit/>
+            <a:noAutofit/>
           </a:bodyPr>
           <a:lstStyle/>
           <a:p>
             <a:pPr algn="r"/>
             <a:r>
-              <a:rPr sz="24000" b="0">
+              <a:rPr sz="30000" b="0">
                 <a:solidFill>
                   <a:srgbClr val="FE7C39"/>
                 </a:solidFill>
                 <a:latin typeface="Georgia"/>
               </a:rPr>
-              <a:t>01</a:t>
+              <a:t>1</a:t>
             </a:r>
           </a:p>
         </p:txBody>
@@ -5329,13 +5329,13 @@
         </p:spPr>
         <p:txBody>
           <a:bodyPr wrap="square" anchor="t" lIns="0" rIns="0" tIns="0" bIns="0">
-            <a:spAutoFit/>
+            <a:noAutofit/>
           </a:bodyPr>
           <a:lstStyle/>
           <a:p>
             <a:pPr algn="l"/>
             <a:r>
-              <a:rPr sz="3600" b="1">
+              <a:rPr sz="4800" b="1">
                 <a:solidFill>
                   <a:srgbClr val="000000"/>
                 </a:solidFill>
@@ -5372,8 +5372,8 @@
         </p:nvSpPr>
         <p:spPr>
           <a:xfrm>
-            <a:off x="1406734" y="1469571"/>
-            <a:ext cx="2813468" cy="3429000"/>
+            <a:off x="1406734" y="979714"/>
+            <a:ext cx="2813468" cy="4408714"/>
           </a:xfrm>
           <a:prstGeom prst="rect">
             <a:avLst/>
@@ -5382,19 +5382,19 @@
         </p:spPr>
         <p:txBody>
           <a:bodyPr wrap="none" anchor="ctr" lIns="0" rIns="0" tIns="0" bIns="0">
-            <a:spAutoFit/>
+            <a:noAutofit/>
           </a:bodyPr>
           <a:lstStyle/>
           <a:p>
             <a:pPr algn="l"/>
             <a:r>
-              <a:rPr sz="24000" b="0">
+              <a:rPr sz="30000" b="0">
                 <a:solidFill>
                   <a:srgbClr val="FE7C39"/>
                 </a:solidFill>
                 <a:latin typeface="Georgia"/>
               </a:rPr>
-              <a:t>02</a:t>
+              <a:t>2</a:t>
             </a:r>
           </a:p>
         </p:txBody>
@@ -5417,13 +5417,13 @@
         </p:spPr>
         <p:txBody>
           <a:bodyPr wrap="square" anchor="t" lIns="0" rIns="0" tIns="0" bIns="0">
-            <a:spAutoFit/>
+            <a:noAutofit/>
           </a:bodyPr>
           <a:lstStyle/>
           <a:p>
             <a:pPr algn="r"/>
             <a:r>
-              <a:rPr sz="3600" b="1">
+              <a:rPr sz="4800" b="1">
                 <a:solidFill>
                   <a:srgbClr val="000000"/>
                 </a:solidFill>
@@ -5503,8 +5503,8 @@
         </p:nvSpPr>
         <p:spPr>
           <a:xfrm>
-            <a:off x="4220202" y="1469571"/>
-            <a:ext cx="3751290" cy="3429000"/>
+            <a:off x="4220202" y="979714"/>
+            <a:ext cx="3751290" cy="4408714"/>
           </a:xfrm>
           <a:prstGeom prst="rect">
             <a:avLst/>
@@ -5513,19 +5513,19 @@
         </p:spPr>
         <p:txBody>
           <a:bodyPr wrap="none" anchor="ctr" lIns="0" rIns="0" tIns="0" bIns="0">
-            <a:spAutoFit/>
+            <a:noAutofit/>
           </a:bodyPr>
           <a:lstStyle/>
           <a:p>
             <a:pPr algn="ctr"/>
             <a:r>
-              <a:rPr sz="24000" b="0">
+              <a:rPr sz="30000" b="0">
                 <a:solidFill>
                   <a:srgbClr val="FE7C39"/>
                 </a:solidFill>
                 <a:latin typeface="Georgia"/>
               </a:rPr>
-              <a:t>03</a:t>
+              <a:t>3</a:t>
             </a:r>
           </a:p>
         </p:txBody>
@@ -5548,13 +5548,13 @@
         </p:spPr>
         <p:txBody>
           <a:bodyPr wrap="square" anchor="t" lIns="0" rIns="0" tIns="0" bIns="0">
-            <a:spAutoFit/>
+            <a:noAutofit/>
           </a:bodyPr>
           <a:lstStyle/>
           <a:p>
             <a:pPr algn="ctr"/>
             <a:r>
-              <a:rPr sz="3600" b="1">
+              <a:rPr sz="4800" b="1">
                 <a:solidFill>
                   <a:srgbClr val="000000"/>
                 </a:solidFill>
@@ -5591,8 +5591,8 @@
         </p:nvSpPr>
         <p:spPr>
           <a:xfrm>
-            <a:off x="7971493" y="1469571"/>
-            <a:ext cx="2813468" cy="3429000"/>
+            <a:off x="7971493" y="979714"/>
+            <a:ext cx="2813468" cy="4408714"/>
           </a:xfrm>
           <a:prstGeom prst="rect">
             <a:avLst/>
@@ -5601,19 +5601,19 @@
         </p:spPr>
         <p:txBody>
           <a:bodyPr wrap="none" anchor="ctr" lIns="0" rIns="0" tIns="0" bIns="0">
-            <a:spAutoFit/>
+            <a:noAutofit/>
           </a:bodyPr>
           <a:lstStyle/>
           <a:p>
             <a:pPr algn="r"/>
             <a:r>
-              <a:rPr sz="24000" b="0">
+              <a:rPr sz="30000" b="0">
                 <a:solidFill>
                   <a:srgbClr val="FE7C39"/>
                 </a:solidFill>
                 <a:latin typeface="Georgia"/>
               </a:rPr>
-              <a:t>04</a:t>
+              <a:t>4</a:t>
             </a:r>
           </a:p>
         </p:txBody>
@@ -5636,13 +5636,13 @@
         </p:spPr>
         <p:txBody>
           <a:bodyPr wrap="square" anchor="t" lIns="0" rIns="0" tIns="0" bIns="0">
-            <a:spAutoFit/>
+            <a:noAutofit/>
           </a:bodyPr>
           <a:lstStyle/>
           <a:p>
             <a:pPr algn="l"/>
             <a:r>
-              <a:rPr sz="3600" b="1">
+              <a:rPr sz="4800" b="1">
                 <a:solidFill>
                   <a:srgbClr val="000000"/>
                 </a:solidFill>
@@ -5689,13 +5689,13 @@
         </p:spPr>
         <p:txBody>
           <a:bodyPr wrap="square" anchor="t" lIns="0" rIns="0" tIns="0" bIns="0">
-            <a:spAutoFit/>
+            <a:noAutofit/>
           </a:bodyPr>
           <a:lstStyle/>
           <a:p>
             <a:pPr algn="l"/>
             <a:r>
-              <a:rPr sz="3600" b="1">
+              <a:rPr sz="4800" b="1">
                 <a:solidFill>
                   <a:srgbClr val="000000"/>
                 </a:solidFill>
@@ -5724,13 +5724,13 @@
         </p:spPr>
         <p:txBody>
           <a:bodyPr wrap="square" anchor="ctr" lIns="0" rIns="0" tIns="0" bIns="0">
-            <a:spAutoFit/>
+            <a:noAutofit/>
           </a:bodyPr>
           <a:lstStyle/>
           <a:p>
             <a:pPr algn="l"/>
             <a:r>
-              <a:rPr sz="16000" b="1">
+              <a:rPr sz="15000" b="1">
                 <a:solidFill>
                   <a:srgbClr val="FD5108"/>
                 </a:solidFill>
@@ -5759,7 +5759,7 @@
         </p:spPr>
         <p:txBody>
           <a:bodyPr wrap="square" anchor="ctr" lIns="0" rIns="0" tIns="0" bIns="0">
-            <a:spAutoFit/>
+            <a:noAutofit/>
           </a:bodyPr>
           <a:lstStyle/>
           <a:p>
@@ -5769,7 +5769,7 @@
               </a:spcAft>
             </a:pPr>
             <a:r>
-              <a:rPr sz="1400" b="0">
+              <a:rPr sz="1500" b="0">
                 <a:solidFill>
                   <a:srgbClr val="000000"/>
                 </a:solidFill>
@@ -5785,7 +5785,7 @@
               </a:spcAft>
             </a:pPr>
             <a:r>
-              <a:rPr sz="1400" b="0">
+              <a:rPr sz="1500" b="0">
                 <a:solidFill>
                   <a:srgbClr val="000000"/>
                 </a:solidFill>
@@ -5801,7 +5801,7 @@
               </a:spcAft>
             </a:pPr>
             <a:r>
-              <a:rPr sz="1400" b="0">
+              <a:rPr sz="1500" b="0">
                 <a:solidFill>
                   <a:srgbClr val="000000"/>
                 </a:solidFill>
@@ -5820,8 +5820,8 @@
         </p:nvSpPr>
         <p:spPr>
           <a:xfrm>
-            <a:off x="0" y="6368142"/>
-            <a:ext cx="12191695" cy="489857"/>
+            <a:off x="468911" y="5878285"/>
+            <a:ext cx="11253872" cy="489857"/>
           </a:xfrm>
           <a:prstGeom prst="rect">
             <a:avLst/>
@@ -5830,7 +5830,7 @@
         </p:spPr>
         <p:txBody>
           <a:bodyPr wrap="square" anchor="t" lIns="0" rIns="0" tIns="0" bIns="0">
-            <a:spAutoFit/>
+            <a:noAutofit/>
           </a:bodyPr>
           <a:lstStyle/>
           <a:p>
@@ -5926,13 +5926,13 @@
         </p:spPr>
         <p:txBody>
           <a:bodyPr wrap="square" anchor="t" lIns="0" rIns="0" tIns="0" bIns="0">
-            <a:spAutoFit/>
+            <a:noAutofit/>
           </a:bodyPr>
           <a:lstStyle/>
           <a:p>
             <a:pPr algn="l"/>
             <a:r>
-              <a:rPr sz="6000" b="1">
+              <a:rPr sz="6600" b="1">
                 <a:solidFill>
                   <a:srgbClr val="000000"/>
                 </a:solidFill>
@@ -5961,13 +5961,13 @@
         </p:spPr>
         <p:txBody>
           <a:bodyPr wrap="square" anchor="t" lIns="0" rIns="0" tIns="0" bIns="0">
-            <a:spAutoFit/>
+            <a:noAutofit/>
           </a:bodyPr>
           <a:lstStyle/>
           <a:p>
             <a:pPr algn="l"/>
             <a:r>
-              <a:rPr sz="1400" b="0">
+              <a:rPr sz="1500" b="0">
                 <a:solidFill>
                   <a:srgbClr val="A1A8B3"/>
                 </a:solidFill>
@@ -6014,13 +6014,13 @@
         </p:spPr>
         <p:txBody>
           <a:bodyPr wrap="square" anchor="t" lIns="0" rIns="0" tIns="0" bIns="0">
-            <a:spAutoFit/>
+            <a:noAutofit/>
           </a:bodyPr>
           <a:lstStyle/>
           <a:p>
             <a:pPr algn="l"/>
             <a:r>
-              <a:rPr sz="3600" b="1">
+              <a:rPr sz="4800" b="1">
                 <a:solidFill>
                   <a:srgbClr val="000000"/>
                 </a:solidFill>
@@ -6049,13 +6049,13 @@
         </p:spPr>
         <p:txBody>
           <a:bodyPr wrap="square" anchor="t" lIns="0" rIns="0" tIns="0" bIns="0">
-            <a:spAutoFit/>
+            <a:noAutofit/>
           </a:bodyPr>
           <a:lstStyle/>
           <a:p>
             <a:pPr algn="l"/>
             <a:r>
-              <a:rPr sz="2400" b="1">
+              <a:rPr sz="2800" b="1">
                 <a:solidFill>
                   <a:srgbClr val="FD5108"/>
                 </a:solidFill>
@@ -6084,7 +6084,7 @@
         </p:spPr>
         <p:txBody>
           <a:bodyPr wrap="square" anchor="t" lIns="0" rIns="0" tIns="0" bIns="0">
-            <a:spAutoFit/>
+            <a:noAutofit/>
           </a:bodyPr>
           <a:lstStyle/>
           <a:p>
@@ -6119,13 +6119,13 @@
         </p:spPr>
         <p:txBody>
           <a:bodyPr wrap="square" anchor="t" lIns="0" rIns="0" tIns="0" bIns="0">
-            <a:spAutoFit/>
+            <a:noAutofit/>
           </a:bodyPr>
           <a:lstStyle/>
           <a:p>
             <a:pPr algn="l"/>
             <a:r>
-              <a:rPr sz="2400" b="1">
+              <a:rPr sz="2800" b="1">
                 <a:solidFill>
                   <a:srgbClr val="FD5108"/>
                 </a:solidFill>
@@ -6154,7 +6154,7 @@
         </p:spPr>
         <p:txBody>
           <a:bodyPr wrap="square" anchor="t" lIns="0" rIns="0" tIns="0" bIns="0">
-            <a:spAutoFit/>
+            <a:noAutofit/>
           </a:bodyPr>
           <a:lstStyle/>
           <a:p>
@@ -6189,13 +6189,13 @@
         </p:spPr>
         <p:txBody>
           <a:bodyPr wrap="square" anchor="t" lIns="0" rIns="0" tIns="0" bIns="0">
-            <a:spAutoFit/>
+            <a:noAutofit/>
           </a:bodyPr>
           <a:lstStyle/>
           <a:p>
             <a:pPr algn="l"/>
             <a:r>
-              <a:rPr sz="2400" b="1">
+              <a:rPr sz="2800" b="1">
                 <a:solidFill>
                   <a:srgbClr val="FD5108"/>
                 </a:solidFill>
@@ -6224,7 +6224,7 @@
         </p:spPr>
         <p:txBody>
           <a:bodyPr wrap="square" anchor="t" lIns="0" rIns="0" tIns="0" bIns="0">
-            <a:spAutoFit/>
+            <a:noAutofit/>
           </a:bodyPr>
           <a:lstStyle/>
           <a:p>
@@ -6259,13 +6259,13 @@
         </p:spPr>
         <p:txBody>
           <a:bodyPr wrap="square" anchor="t" lIns="0" rIns="0" tIns="0" bIns="0">
-            <a:spAutoFit/>
+            <a:noAutofit/>
           </a:bodyPr>
           <a:lstStyle/>
           <a:p>
             <a:pPr algn="l"/>
             <a:r>
-              <a:rPr sz="2400" b="1">
+              <a:rPr sz="2800" b="1">
                 <a:solidFill>
                   <a:srgbClr val="FD5108"/>
                 </a:solidFill>
@@ -6294,7 +6294,7 @@
         </p:spPr>
         <p:txBody>
           <a:bodyPr wrap="square" anchor="t" lIns="0" rIns="0" tIns="0" bIns="0">
-            <a:spAutoFit/>
+            <a:noAutofit/>
           </a:bodyPr>
           <a:lstStyle/>
           <a:p>
@@ -6329,13 +6329,13 @@
         </p:spPr>
         <p:txBody>
           <a:bodyPr wrap="square" anchor="t" lIns="0" rIns="0" tIns="0" bIns="0">
-            <a:spAutoFit/>
+            <a:noAutofit/>
           </a:bodyPr>
           <a:lstStyle/>
           <a:p>
             <a:pPr algn="l"/>
             <a:r>
-              <a:rPr sz="2400" b="1">
+              <a:rPr sz="2800" b="1">
                 <a:solidFill>
                   <a:srgbClr val="FD5108"/>
                 </a:solidFill>
@@ -6364,7 +6364,7 @@
         </p:spPr>
         <p:txBody>
           <a:bodyPr wrap="square" anchor="t" lIns="0" rIns="0" tIns="0" bIns="0">
-            <a:spAutoFit/>
+            <a:noAutofit/>
           </a:bodyPr>
           <a:lstStyle/>
           <a:p>
@@ -6417,13 +6417,13 @@
         </p:spPr>
         <p:txBody>
           <a:bodyPr wrap="square" anchor="t" lIns="0" rIns="0" tIns="0" bIns="0">
-            <a:spAutoFit/>
+            <a:noAutofit/>
           </a:bodyPr>
           <a:lstStyle/>
           <a:p>
             <a:pPr algn="l"/>
             <a:r>
-              <a:rPr sz="3600" b="1">
+              <a:rPr sz="4800" b="1">
                 <a:solidFill>
                   <a:srgbClr val="000000"/>
                 </a:solidFill>
@@ -6452,7 +6452,7 @@
         </p:spPr>
         <p:txBody>
           <a:bodyPr wrap="square" anchor="t" lIns="0" rIns="0" tIns="0" bIns="0">
-            <a:spAutoFit/>
+            <a:noAutofit/>
           </a:bodyPr>
           <a:lstStyle/>
           <a:p>
@@ -6487,7 +6487,7 @@
         </p:spPr>
         <p:txBody>
           <a:bodyPr wrap="square" anchor="t" lIns="0" rIns="0" tIns="0" bIns="0">
-            <a:spAutoFit/>
+            <a:noAutofit/>
           </a:bodyPr>
           <a:lstStyle/>
           <a:p>
@@ -6522,13 +6522,13 @@
         </p:spPr>
         <p:txBody>
           <a:bodyPr wrap="square" anchor="t" lIns="0" rIns="0" tIns="0" bIns="0">
-            <a:spAutoFit/>
+            <a:noAutofit/>
           </a:bodyPr>
           <a:lstStyle/>
           <a:p>
             <a:pPr algn="l"/>
             <a:r>
-              <a:rPr sz="1400" b="0">
+              <a:rPr sz="1500" b="0">
                 <a:solidFill>
                   <a:srgbClr val="000000"/>
                 </a:solidFill>
@@ -6557,7 +6557,7 @@
         </p:spPr>
         <p:txBody>
           <a:bodyPr wrap="square" anchor="t" lIns="0" rIns="0" tIns="0" bIns="0">
-            <a:spAutoFit/>
+            <a:noAutofit/>
           </a:bodyPr>
           <a:lstStyle/>
           <a:p>
@@ -6592,7 +6592,7 @@
         </p:spPr>
         <p:txBody>
           <a:bodyPr wrap="square" anchor="t" lIns="0" rIns="0" tIns="0" bIns="0">
-            <a:spAutoFit/>
+            <a:noAutofit/>
           </a:bodyPr>
           <a:lstStyle/>
           <a:p>
@@ -6627,13 +6627,13 @@
         </p:spPr>
         <p:txBody>
           <a:bodyPr wrap="square" anchor="t" lIns="0" rIns="0" tIns="0" bIns="0">
-            <a:spAutoFit/>
+            <a:noAutofit/>
           </a:bodyPr>
           <a:lstStyle/>
           <a:p>
             <a:pPr algn="l"/>
             <a:r>
-              <a:rPr sz="1400" b="0">
+              <a:rPr sz="1500" b="0">
                 <a:solidFill>
                   <a:srgbClr val="000000"/>
                 </a:solidFill>
@@ -6662,7 +6662,7 @@
         </p:spPr>
         <p:txBody>
           <a:bodyPr wrap="square" anchor="t" lIns="0" rIns="0" tIns="0" bIns="0">
-            <a:spAutoFit/>
+            <a:noAutofit/>
           </a:bodyPr>
           <a:lstStyle/>
           <a:p>
@@ -6697,7 +6697,7 @@
         </p:spPr>
         <p:txBody>
           <a:bodyPr wrap="square" anchor="t" lIns="0" rIns="0" tIns="0" bIns="0">
-            <a:spAutoFit/>
+            <a:noAutofit/>
           </a:bodyPr>
           <a:lstStyle/>
           <a:p>
@@ -6732,13 +6732,13 @@
         </p:spPr>
         <p:txBody>
           <a:bodyPr wrap="square" anchor="t" lIns="0" rIns="0" tIns="0" bIns="0">
-            <a:spAutoFit/>
+            <a:noAutofit/>
           </a:bodyPr>
           <a:lstStyle/>
           <a:p>
             <a:pPr algn="l"/>
             <a:r>
-              <a:rPr sz="1400" b="0">
+              <a:rPr sz="1500" b="0">
                 <a:solidFill>
                   <a:srgbClr val="000000"/>
                 </a:solidFill>
@@ -6767,7 +6767,7 @@
         </p:spPr>
         <p:txBody>
           <a:bodyPr wrap="square" anchor="t" lIns="0" rIns="0" tIns="0" bIns="0">
-            <a:spAutoFit/>
+            <a:noAutofit/>
           </a:bodyPr>
           <a:lstStyle/>
           <a:p>
@@ -6802,7 +6802,7 @@
         </p:spPr>
         <p:txBody>
           <a:bodyPr wrap="square" anchor="t" lIns="0" rIns="0" tIns="0" bIns="0">
-            <a:spAutoFit/>
+            <a:noAutofit/>
           </a:bodyPr>
           <a:lstStyle/>
           <a:p>
@@ -6837,13 +6837,13 @@
         </p:spPr>
         <p:txBody>
           <a:bodyPr wrap="square" anchor="t" lIns="0" rIns="0" tIns="0" bIns="0">
-            <a:spAutoFit/>
+            <a:noAutofit/>
           </a:bodyPr>
           <a:lstStyle/>
           <a:p>
             <a:pPr algn="l"/>
             <a:r>
-              <a:rPr sz="1400" b="0">
+              <a:rPr sz="1500" b="0">
                 <a:solidFill>
                   <a:srgbClr val="000000"/>
                 </a:solidFill>
@@ -6872,7 +6872,7 @@
         </p:spPr>
         <p:txBody>
           <a:bodyPr wrap="square" anchor="t" lIns="0" rIns="0" tIns="0" bIns="0">
-            <a:spAutoFit/>
+            <a:noAutofit/>
           </a:bodyPr>
           <a:lstStyle/>
           <a:p>
@@ -6907,7 +6907,7 @@
         </p:spPr>
         <p:txBody>
           <a:bodyPr wrap="square" anchor="t" lIns="0" rIns="0" tIns="0" bIns="0">
-            <a:spAutoFit/>
+            <a:noAutofit/>
           </a:bodyPr>
           <a:lstStyle/>
           <a:p>
@@ -6942,13 +6942,13 @@
         </p:spPr>
         <p:txBody>
           <a:bodyPr wrap="square" anchor="t" lIns="0" rIns="0" tIns="0" bIns="0">
-            <a:spAutoFit/>
+            <a:noAutofit/>
           </a:bodyPr>
           <a:lstStyle/>
           <a:p>
             <a:pPr algn="l"/>
             <a:r>
-              <a:rPr sz="1400" b="0">
+              <a:rPr sz="1500" b="0">
                 <a:solidFill>
                   <a:srgbClr val="000000"/>
                 </a:solidFill>
@@ -6977,7 +6977,7 @@
         </p:spPr>
         <p:txBody>
           <a:bodyPr wrap="square" anchor="t" lIns="0" rIns="0" tIns="0" bIns="0">
-            <a:spAutoFit/>
+            <a:noAutofit/>
           </a:bodyPr>
           <a:lstStyle/>
           <a:p>
@@ -7012,7 +7012,7 @@
         </p:spPr>
         <p:txBody>
           <a:bodyPr wrap="square" anchor="t" lIns="0" rIns="0" tIns="0" bIns="0">
-            <a:spAutoFit/>
+            <a:noAutofit/>
           </a:bodyPr>
           <a:lstStyle/>
           <a:p>
@@ -7047,13 +7047,13 @@
         </p:spPr>
         <p:txBody>
           <a:bodyPr wrap="square" anchor="t" lIns="0" rIns="0" tIns="0" bIns="0">
-            <a:spAutoFit/>
+            <a:noAutofit/>
           </a:bodyPr>
           <a:lstStyle/>
           <a:p>
             <a:pPr algn="l"/>
             <a:r>
-              <a:rPr sz="1400" b="0">
+              <a:rPr sz="1500" b="0">
                 <a:solidFill>
                   <a:srgbClr val="000000"/>
                 </a:solidFill>

--- a/examples/out_v2.pptx
+++ b/examples/out_v2.pptx
@@ -3355,8 +3355,8 @@
         </p:nvSpPr>
         <p:spPr>
           <a:xfrm>
-            <a:off x="468911" y="3429000"/>
-            <a:ext cx="2813468" cy="2939142"/>
+            <a:off x="468911" y="2939142"/>
+            <a:ext cx="2813468" cy="3429000"/>
           </a:xfrm>
           <a:prstGeom prst="rect">
             <a:avLst/>
@@ -3471,8 +3471,8 @@
         </p:nvSpPr>
         <p:spPr>
           <a:xfrm>
-            <a:off x="3282379" y="3429000"/>
-            <a:ext cx="2813468" cy="2939142"/>
+            <a:off x="3282379" y="2939142"/>
+            <a:ext cx="2813468" cy="3429000"/>
           </a:xfrm>
           <a:prstGeom prst="rect">
             <a:avLst/>
@@ -3587,8 +3587,8 @@
         </p:nvSpPr>
         <p:spPr>
           <a:xfrm>
-            <a:off x="6095847" y="3429000"/>
-            <a:ext cx="2813468" cy="2939142"/>
+            <a:off x="6095847" y="2939142"/>
+            <a:ext cx="2813468" cy="3429000"/>
           </a:xfrm>
           <a:prstGeom prst="rect">
             <a:avLst/>
@@ -3703,8 +3703,8 @@
         </p:nvSpPr>
         <p:spPr>
           <a:xfrm>
-            <a:off x="8909315" y="3429000"/>
-            <a:ext cx="2813468" cy="2939142"/>
+            <a:off x="8909315" y="2939142"/>
+            <a:ext cx="2813468" cy="3429000"/>
           </a:xfrm>
           <a:prstGeom prst="rect">
             <a:avLst/>
@@ -3792,7 +3792,7 @@
         <p:spPr>
           <a:xfrm>
             <a:off x="468911" y="1469571"/>
-            <a:ext cx="937822" cy="979714"/>
+            <a:ext cx="937822" cy="1469571"/>
           </a:xfrm>
           <a:prstGeom prst="rect">
             <a:avLst/>
@@ -3838,7 +3838,7 @@
         <p:spPr>
           <a:xfrm>
             <a:off x="1519271" y="1469571"/>
-            <a:ext cx="2700930" cy="979714"/>
+            <a:ext cx="2700930" cy="1469571"/>
           </a:xfrm>
           <a:prstGeom prst="rect">
             <a:avLst/>
@@ -3872,8 +3872,8 @@
         </p:nvSpPr>
         <p:spPr>
           <a:xfrm>
-            <a:off x="468911" y="2449285"/>
-            <a:ext cx="3751290" cy="1469571"/>
+            <a:off x="468911" y="2939142"/>
+            <a:ext cx="3751290" cy="979714"/>
           </a:xfrm>
           <a:prstGeom prst="rect">
             <a:avLst/>
@@ -3908,7 +3908,7 @@
         <p:spPr>
           <a:xfrm>
             <a:off x="4220202" y="1469571"/>
-            <a:ext cx="937822" cy="979714"/>
+            <a:ext cx="937822" cy="1469571"/>
           </a:xfrm>
           <a:prstGeom prst="rect">
             <a:avLst/>
@@ -3954,7 +3954,7 @@
         <p:spPr>
           <a:xfrm>
             <a:off x="5270562" y="1469571"/>
-            <a:ext cx="2700930" cy="979714"/>
+            <a:ext cx="2700930" cy="1469571"/>
           </a:xfrm>
           <a:prstGeom prst="rect">
             <a:avLst/>
@@ -3988,8 +3988,8 @@
         </p:nvSpPr>
         <p:spPr>
           <a:xfrm>
-            <a:off x="4220202" y="2449285"/>
-            <a:ext cx="3751290" cy="1469571"/>
+            <a:off x="4220202" y="2939142"/>
+            <a:ext cx="3751290" cy="979714"/>
           </a:xfrm>
           <a:prstGeom prst="rect">
             <a:avLst/>
@@ -4024,7 +4024,7 @@
         <p:spPr>
           <a:xfrm>
             <a:off x="7971493" y="1469571"/>
-            <a:ext cx="937822" cy="979714"/>
+            <a:ext cx="937822" cy="1469571"/>
           </a:xfrm>
           <a:prstGeom prst="rect">
             <a:avLst/>
@@ -4070,7 +4070,7 @@
         <p:spPr>
           <a:xfrm>
             <a:off x="9021853" y="1469571"/>
-            <a:ext cx="2700930" cy="979714"/>
+            <a:ext cx="2700930" cy="1469571"/>
           </a:xfrm>
           <a:prstGeom prst="rect">
             <a:avLst/>
@@ -4104,8 +4104,8 @@
         </p:nvSpPr>
         <p:spPr>
           <a:xfrm>
-            <a:off x="7971493" y="2449285"/>
-            <a:ext cx="3751290" cy="1469571"/>
+            <a:off x="7971493" y="2939142"/>
+            <a:ext cx="3751290" cy="979714"/>
           </a:xfrm>
           <a:prstGeom prst="rect">
             <a:avLst/>
@@ -4140,7 +4140,7 @@
         <p:spPr>
           <a:xfrm>
             <a:off x="468911" y="3918857"/>
-            <a:ext cx="937822" cy="979714"/>
+            <a:ext cx="937822" cy="1469571"/>
           </a:xfrm>
           <a:prstGeom prst="rect">
             <a:avLst/>
@@ -4186,7 +4186,7 @@
         <p:spPr>
           <a:xfrm>
             <a:off x="1519271" y="3918857"/>
-            <a:ext cx="2700930" cy="979714"/>
+            <a:ext cx="2700930" cy="1469571"/>
           </a:xfrm>
           <a:prstGeom prst="rect">
             <a:avLst/>
@@ -4220,8 +4220,8 @@
         </p:nvSpPr>
         <p:spPr>
           <a:xfrm>
-            <a:off x="468911" y="4898571"/>
-            <a:ext cx="3751290" cy="1469571"/>
+            <a:off x="468911" y="5388428"/>
+            <a:ext cx="3751290" cy="979714"/>
           </a:xfrm>
           <a:prstGeom prst="rect">
             <a:avLst/>
@@ -4256,7 +4256,7 @@
         <p:spPr>
           <a:xfrm>
             <a:off x="4220202" y="3918857"/>
-            <a:ext cx="937822" cy="979714"/>
+            <a:ext cx="937822" cy="1469571"/>
           </a:xfrm>
           <a:prstGeom prst="rect">
             <a:avLst/>
@@ -4302,7 +4302,7 @@
         <p:spPr>
           <a:xfrm>
             <a:off x="5270562" y="3918857"/>
-            <a:ext cx="2700930" cy="979714"/>
+            <a:ext cx="2700930" cy="1469571"/>
           </a:xfrm>
           <a:prstGeom prst="rect">
             <a:avLst/>
@@ -4336,8 +4336,8 @@
         </p:nvSpPr>
         <p:spPr>
           <a:xfrm>
-            <a:off x="4220202" y="4898571"/>
-            <a:ext cx="3751290" cy="1469571"/>
+            <a:off x="4220202" y="5388428"/>
+            <a:ext cx="3751290" cy="979714"/>
           </a:xfrm>
           <a:prstGeom prst="rect">
             <a:avLst/>
@@ -4372,7 +4372,7 @@
         <p:spPr>
           <a:xfrm>
             <a:off x="7971493" y="3918857"/>
-            <a:ext cx="937822" cy="979714"/>
+            <a:ext cx="937822" cy="1469571"/>
           </a:xfrm>
           <a:prstGeom prst="rect">
             <a:avLst/>
@@ -4418,7 +4418,7 @@
         <p:spPr>
           <a:xfrm>
             <a:off x="9021853" y="3918857"/>
-            <a:ext cx="2700930" cy="979714"/>
+            <a:ext cx="2700930" cy="1469571"/>
           </a:xfrm>
           <a:prstGeom prst="rect">
             <a:avLst/>
@@ -4452,8 +4452,8 @@
         </p:nvSpPr>
         <p:spPr>
           <a:xfrm>
-            <a:off x="7971493" y="4898571"/>
-            <a:ext cx="3751290" cy="1469571"/>
+            <a:off x="7971493" y="5388428"/>
+            <a:ext cx="3751290" cy="979714"/>
           </a:xfrm>
           <a:prstGeom prst="rect">
             <a:avLst/>
@@ -5503,7 +5503,7 @@
         </p:nvSpPr>
         <p:spPr>
           <a:xfrm>
-            <a:off x="4220202" y="979714"/>
+            <a:off x="4220202" y="489857"/>
             <a:ext cx="3751290" cy="4408714"/>
           </a:xfrm>
           <a:prstGeom prst="rect">
@@ -5916,16 +5916,16 @@
         </p:nvSpPr>
         <p:spPr>
           <a:xfrm>
-            <a:off x="468911" y="1959428"/>
-            <a:ext cx="9378227" cy="1959428"/>
-          </a:xfrm>
-          <a:prstGeom prst="rect">
-            <a:avLst/>
-          </a:prstGeom>
-          <a:noFill/>
-        </p:spPr>
-        <p:txBody>
-          <a:bodyPr wrap="square" anchor="t" lIns="0" rIns="0" tIns="0" bIns="0">
+            <a:off x="468911" y="1469571"/>
+            <a:ext cx="11253872" cy="3429000"/>
+          </a:xfrm>
+          <a:prstGeom prst="rect">
+            <a:avLst/>
+          </a:prstGeom>
+          <a:noFill/>
+        </p:spPr>
+        <p:txBody>
+          <a:bodyPr wrap="square" anchor="ctr" lIns="0" rIns="0" tIns="0" bIns="0">
             <a:noAutofit/>
           </a:bodyPr>
           <a:lstStyle/>
@@ -5951,8 +5951,8 @@
         </p:nvSpPr>
         <p:spPr>
           <a:xfrm>
-            <a:off x="468911" y="4408714"/>
-            <a:ext cx="9378227" cy="979714"/>
+            <a:off x="468911" y="4898571"/>
+            <a:ext cx="11253872" cy="979714"/>
           </a:xfrm>
           <a:prstGeom prst="rect">
             <a:avLst/>
